--- a/vault/courses/gemini-enterprise-agents/ch05-slides.pptx
+++ b/vault/courses/gemini-enterprise-agents/ch05-slides.pptx
@@ -3110,8 +3110,8 @@
         </p:nvSpPr>
         <p:spPr>
           <a:xfrm>
-            <a:off x="914400" y="1828800"/>
-            <a:ext cx="10332720" cy="2286000"/>
+            <a:off x="914400" y="1280160"/>
+            <a:ext cx="10332720" cy="457200"/>
           </a:xfrm>
           <a:prstGeom prst="rect">
             <a:avLst/>
@@ -3126,12 +3126,12 @@
           <a:p>
             <a:pPr algn="ctr"/>
             <a:r>
-              <a:rPr sz="3400" b="1">
-                <a:solidFill>
-                  <a:srgbClr val="FFFFFF"/>
+              <a:rPr sz="1400" b="0">
+                <a:solidFill>
+                  <a:srgbClr val="A1A1AA"/>
                 </a:solidFill>
               </a:rPr>
-              <a:t>Enterprise Security: CISO-Defensible Agent Deployments</a:t>
+              <a:t>Chapter 5</a:t>
             </a:r>
           </a:p>
         </p:txBody>
@@ -3144,8 +3144,8 @@
         </p:nvSpPr>
         <p:spPr>
           <a:xfrm>
-            <a:off x="914400" y="4297680"/>
-            <a:ext cx="10332720" cy="457200"/>
+            <a:off x="914400" y="1737360"/>
+            <a:ext cx="10332720" cy="2560320"/>
           </a:xfrm>
           <a:prstGeom prst="rect">
             <a:avLst/>
@@ -3160,7 +3160,75 @@
           <a:p>
             <a:pPr algn="ctr"/>
             <a:r>
-              <a:rPr sz="1600" b="0">
+              <a:rPr sz="3200" b="1">
+                <a:solidFill>
+                  <a:srgbClr val="FFFFFF"/>
+                </a:solidFill>
+              </a:rPr>
+              <a:t>Enterprise Security: CISO-Defensible Agent Deployments</a:t>
+            </a:r>
+          </a:p>
+        </p:txBody>
+      </p:sp>
+      <p:sp>
+        <p:nvSpPr>
+          <p:cNvPr id="4" name="TextBox 3"/>
+          <p:cNvSpPr txBox="1"/>
+          <p:nvPr/>
+        </p:nvSpPr>
+        <p:spPr>
+          <a:xfrm>
+            <a:off x="914400" y="4480560"/>
+            <a:ext cx="10332720" cy="457200"/>
+          </a:xfrm>
+          <a:prstGeom prst="rect">
+            <a:avLst/>
+          </a:prstGeom>
+          <a:noFill/>
+        </p:spPr>
+        <p:txBody>
+          <a:bodyPr wrap="square">
+            <a:spAutoFit/>
+          </a:bodyPr>
+          <a:lstStyle/>
+          <a:p>
+            <a:pPr algn="ctr"/>
+            <a:r>
+              <a:rPr sz="1400" b="0">
+                <a:solidFill>
+                  <a:srgbClr val="A1A1AA"/>
+                </a:solidFill>
+              </a:rPr>
+              <a:t>academy.kspl.tech | Koenig AI Academy</a:t>
+            </a:r>
+          </a:p>
+        </p:txBody>
+      </p:sp>
+      <p:sp>
+        <p:nvSpPr>
+          <p:cNvPr id="5" name="TextBox 4"/>
+          <p:cNvSpPr txBox="1"/>
+          <p:nvPr/>
+        </p:nvSpPr>
+        <p:spPr>
+          <a:xfrm>
+            <a:off x="914400" y="5029200"/>
+            <a:ext cx="10332720" cy="365760"/>
+          </a:xfrm>
+          <a:prstGeom prst="rect">
+            <a:avLst/>
+          </a:prstGeom>
+          <a:noFill/>
+        </p:spPr>
+        <p:txBody>
+          <a:bodyPr wrap="square">
+            <a:spAutoFit/>
+          </a:bodyPr>
+          <a:lstStyle/>
+          <a:p>
+            <a:pPr algn="ctr"/>
+            <a:r>
+              <a:rPr sz="1300" b="0">
                 <a:solidFill>
                   <a:srgbClr val="A1A1AA"/>
                 </a:solidFill>
@@ -3172,7 +3240,7 @@
       </p:sp>
       <p:sp>
         <p:nvSpPr>
-          <p:cNvPr id="4" name="TextBox 3"/>
+          <p:cNvPr id="6" name="TextBox 5"/>
           <p:cNvSpPr txBox="1"/>
           <p:nvPr/>
         </p:nvSpPr>
@@ -3239,7 +3307,7 @@
         <p:spPr>
           <a:xfrm>
             <a:off x="731520" y="411480"/>
-            <a:ext cx="10698480" cy="1005840"/>
+            <a:ext cx="10698480" cy="914400"/>
           </a:xfrm>
           <a:prstGeom prst="rect">
             <a:avLst/>
@@ -3259,7 +3327,7 @@
                   <a:srgbClr val="FFFFFF"/>
                 </a:solidFill>
               </a:rPr>
-              <a:t>Key facts</a:t>
+              <a:t>What You'll Learn</a:t>
             </a:r>
           </a:p>
         </p:txBody>
@@ -3316,7 +3384,7 @@
         <p:spPr>
           <a:xfrm>
             <a:off x="731520" y="1600200"/>
-            <a:ext cx="10698480" cy="960120"/>
+            <a:ext cx="10698480" cy="914400"/>
           </a:xfrm>
           <a:prstGeom prst="rect">
             <a:avLst/>
@@ -3331,12 +3399,12 @@
           <a:p>
             <a:pPr algn="l"/>
             <a:r>
-              <a:rPr sz="1700" b="0">
+              <a:rPr sz="1500" b="0">
                 <a:solidFill>
                   <a:srgbClr val="FFFFFF"/>
                 </a:solidFill>
               </a:rPr>
-              <a:t>  Every GEAP agent receives a SPIFFE ID of the form spiffe://.gcp/agent/ issued by Agent Identity at deploy time [2]</a:t>
+              <a:t>  • Configure Agent Identity (SPIFFE-formatted ID) per agent and assign IAM roles directly to the agent</a:t>
             </a:r>
           </a:p>
         </p:txBody>
@@ -3349,8 +3417,8 @@
         </p:nvSpPr>
         <p:spPr>
           <a:xfrm>
-            <a:off x="731520" y="2651760"/>
-            <a:ext cx="10698480" cy="960120"/>
+            <a:off x="731520" y="2514600"/>
+            <a:ext cx="10698480" cy="914400"/>
           </a:xfrm>
           <a:prstGeom prst="rect">
             <a:avLst/>
@@ -3365,12 +3433,12 @@
           <a:p>
             <a:pPr algn="l"/>
             <a:r>
-              <a:rPr sz="1700" b="0">
+              <a:rPr sz="1500" b="0">
                 <a:solidFill>
                   <a:srgbClr val="FFFFFF"/>
                 </a:solidFill>
               </a:rPr>
-              <a:t>  IAM bindings can target the agent's SPIFFE ID directly — no shared service account is required, and no service-account-k</a:t>
+              <a:t>  • Set up Agent Gateway as the single traffic enforcement point and apply Model Armor inspection</a:t>
             </a:r>
           </a:p>
         </p:txBody>
@@ -3383,8 +3451,8 @@
         </p:nvSpPr>
         <p:spPr>
           <a:xfrm>
-            <a:off x="731520" y="3703320"/>
-            <a:ext cx="10698480" cy="960120"/>
+            <a:off x="731520" y="3429000"/>
+            <a:ext cx="10698480" cy="914400"/>
           </a:xfrm>
           <a:prstGeom prst="rect">
             <a:avLst/>
@@ -3399,12 +3467,12 @@
           <a:p>
             <a:pPr algn="l"/>
             <a:r>
-              <a:rPr sz="1700" b="0">
+              <a:rPr sz="1500" b="0">
                 <a:solidFill>
                   <a:srgbClr val="FFFFFF"/>
                 </a:solidFill>
               </a:rPr>
-              <a:t>  Agent Gateway is mandatory for any tool call that crosses a VPC boundary; bypass attempts surface as a policy_violation </a:t>
+              <a:t>  • Implement user-delegated OAuth 2.0 via Agent Identity Auth Manager so agents act on behalf of specific users</a:t>
             </a:r>
           </a:p>
         </p:txBody>
@@ -3417,8 +3485,8 @@
         </p:nvSpPr>
         <p:spPr>
           <a:xfrm>
-            <a:off x="731520" y="4754880"/>
-            <a:ext cx="10698480" cy="960120"/>
+            <a:off x="731520" y="4343400"/>
+            <a:ext cx="10698480" cy="914400"/>
           </a:xfrm>
           <a:prstGeom prst="rect">
             <a:avLst/>
@@ -3433,12 +3501,12 @@
           <a:p>
             <a:pPr algn="l"/>
             <a:r>
-              <a:rPr sz="1700" b="0">
+              <a:rPr sz="1500" b="0">
                 <a:solidFill>
                   <a:srgbClr val="FFFFFF"/>
                 </a:solidFill>
               </a:rPr>
-              <a:t>  Model Armor — Google's prompt-injection and data-leak inspector — can be enabled in BLOCK or OBSERVE mode per Gateway po</a:t>
+              <a:t>  • Apply VPC Service Controls and Customer-Managed Encryption Keys for EU/India data residency</a:t>
             </a:r>
           </a:p>
         </p:txBody>
@@ -3446,6 +3514,40 @@
       <p:sp>
         <p:nvSpPr>
           <p:cNvPr id="8" name="TextBox 7"/>
+          <p:cNvSpPr txBox="1"/>
+          <p:nvPr/>
+        </p:nvSpPr>
+        <p:spPr>
+          <a:xfrm>
+            <a:off x="731520" y="5257800"/>
+            <a:ext cx="10698480" cy="914400"/>
+          </a:xfrm>
+          <a:prstGeom prst="rect">
+            <a:avLst/>
+          </a:prstGeom>
+          <a:noFill/>
+        </p:spPr>
+        <p:txBody>
+          <a:bodyPr wrap="square">
+            <a:spAutoFit/>
+          </a:bodyPr>
+          <a:lstStyle/>
+          <a:p>
+            <a:pPr algn="l"/>
+            <a:r>
+              <a:rPr sz="1500" b="0">
+                <a:solidFill>
+                  <a:srgbClr val="FFFFFF"/>
+                </a:solidFill>
+              </a:rPr>
+              <a:t>  • Write a security review checklist that a CISO can approve for a GEAP deployment</a:t>
+            </a:r>
+          </a:p>
+        </p:txBody>
+      </p:sp>
+      <p:sp>
+        <p:nvSpPr>
+          <p:cNvPr id="9" name="TextBox 8"/>
           <p:cNvSpPr txBox="1"/>
           <p:nvPr/>
         </p:nvSpPr>
@@ -3527,12 +3629,12 @@
           <a:p>
             <a:pPr algn="l"/>
             <a:r>
-              <a:rPr sz="2800" b="1">
+              <a:rPr sz="2600" b="1">
                 <a:solidFill>
                   <a:srgbClr val="FFFFFF"/>
                 </a:solidFill>
               </a:rPr>
-              <a:t>Why agent security is not API security</a:t>
+              <a:t>Key facts</a:t>
             </a:r>
           </a:p>
         </p:txBody>
@@ -3604,12 +3706,12 @@
           <a:p>
             <a:pPr algn="l"/>
             <a:r>
-              <a:rPr sz="1700" b="0">
+              <a:rPr sz="1600" b="0">
                 <a:solidFill>
                   <a:srgbClr val="FFFFFF"/>
                 </a:solidFill>
               </a:rPr>
-              <a:t>  A CISO who has rubber-stamped a hundred Cloud Run deployments will see a GEAP agent and reach for the wrong checklist. A</a:t>
+              <a:t>  Every GEAP agent receives a SPIFFE ID of the form spiffe://.gcp/agent/ issued…</a:t>
             </a:r>
           </a:p>
         </p:txBody>
@@ -3638,12 +3740,12 @@
           <a:p>
             <a:pPr algn="l"/>
             <a:r>
-              <a:rPr sz="1700" b="0">
+              <a:rPr sz="1600" b="0">
                 <a:solidFill>
                   <a:srgbClr val="FFFFFF"/>
                 </a:solidFill>
               </a:rPr>
-              <a:t>  An agent's request graph is unbounded at design time. A REST endpoint declares its dependencies in the manifest — three </a:t>
+              <a:t>  IAM bindings can target the agent's SPIFFE ID directly — no shared service…</a:t>
             </a:r>
           </a:p>
         </p:txBody>
@@ -3672,12 +3774,12 @@
           <a:p>
             <a:pPr algn="l"/>
             <a:r>
-              <a:rPr sz="1700" b="0">
+              <a:rPr sz="1600" b="0">
                 <a:solidFill>
                   <a:srgbClr val="FFFFFF"/>
                 </a:solidFill>
               </a:rPr>
-              <a:t>  Identity is layered, not scalar. A web service runs as one service account. A GEAP agent has at least three identities a</a:t>
+              <a:t>  Agent Gateway is mandatory for any tool call that crosses a VPC boundary;…</a:t>
             </a:r>
           </a:p>
         </p:txBody>
@@ -3706,12 +3808,12 @@
           <a:p>
             <a:pPr algn="l"/>
             <a:r>
-              <a:rPr sz="1700" b="0">
+              <a:rPr sz="1600" b="0">
                 <a:solidFill>
                   <a:srgbClr val="FFFFFF"/>
                 </a:solidFill>
               </a:rPr>
-              <a:t>  The model itself is an attack vector. Prompt injection is a class of vulnerability that has no analogue in REST APIs. A </a:t>
+              <a:t>  Model Armor — Google's prompt-injection and data-leak inspector — can be…</a:t>
             </a:r>
           </a:p>
         </p:txBody>
@@ -3800,12 +3902,12 @@
           <a:p>
             <a:pPr algn="l"/>
             <a:r>
-              <a:rPr sz="2800" b="1">
+              <a:rPr sz="2600" b="1">
                 <a:solidFill>
                   <a:srgbClr val="FFFFFF"/>
                 </a:solidFill>
               </a:rPr>
-              <a:t>Control 1: Agent Identity and IAM</a:t>
+              <a:t>Why agent security is not API security</a:t>
             </a:r>
           </a:p>
         </p:txBody>
@@ -3877,12 +3979,12 @@
           <a:p>
             <a:pPr algn="l"/>
             <a:r>
-              <a:rPr sz="1700" b="0">
+              <a:rPr sz="1600" b="0">
                 <a:solidFill>
                   <a:srgbClr val="FFFFFF"/>
                 </a:solidFill>
               </a:rPr>
-              <a:t>  The first thing to disable in any GEAP deployment is the legacy "default service account" pattern. Every agent should ha</a:t>
+              <a:t>  A CISO who has rubber-stamped a hundred Cloud Run deployments will see a GEAP…</a:t>
             </a:r>
           </a:p>
         </p:txBody>
@@ -3911,12 +4013,12 @@
           <a:p>
             <a:pPr algn="l"/>
             <a:r>
-              <a:rPr sz="1700" b="0">
+              <a:rPr sz="1600" b="0">
                 <a:solidFill>
                   <a:srgbClr val="FFFFFF"/>
                 </a:solidFill>
               </a:rPr>
-              <a:t>  When you call client.agent_engines.create(), the platform automatically issues a SPIFFE ID:</a:t>
+              <a:t>  Agent workloads break four assumptions that traditional API hardening relies on.</a:t>
             </a:r>
           </a:p>
         </p:txBody>
@@ -3945,12 +4047,12 @@
           <a:p>
             <a:pPr algn="l"/>
             <a:r>
-              <a:rPr sz="1700" b="0">
+              <a:rPr sz="1600" b="0">
                 <a:solidFill>
                   <a:srgbClr val="FFFFFF"/>
                 </a:solidFill>
               </a:rPr>
-              <a:t>  spiffe://acme-prod-7841.gcp/agent/invoice-extractor-v3</a:t>
+              <a:t>  An agent's request graph is unbounded at design time.</a:t>
             </a:r>
           </a:p>
         </p:txBody>
@@ -3979,12 +4081,12 @@
           <a:p>
             <a:pPr algn="l"/>
             <a:r>
-              <a:rPr sz="1700" b="0">
+              <a:rPr sz="1600" b="0">
                 <a:solidFill>
                   <a:srgbClr val="FFFFFF"/>
                 </a:solidFill>
               </a:rPr>
-              <a:t>  The format is spiffe:///agent/ — this matches the SPIFFE specification for cross-platform workload identity, which means</a:t>
+              <a:t>  A REST endpoint declares its dependencies in the manifest — three downstream…</a:t>
             </a:r>
           </a:p>
         </p:txBody>
@@ -4073,12 +4175,12 @@
           <a:p>
             <a:pPr algn="l"/>
             <a:r>
-              <a:rPr sz="2800" b="1">
+              <a:rPr sz="2600" b="1">
                 <a:solidFill>
                   <a:srgbClr val="FFFFFF"/>
                 </a:solidFill>
               </a:rPr>
-              <a:t>Control 2: Agent Gateway and Model Armor</a:t>
+              <a:t>Control 1: Agent Identity and IAM</a:t>
             </a:r>
           </a:p>
         </p:txBody>
@@ -4150,12 +4252,12 @@
           <a:p>
             <a:pPr algn="l"/>
             <a:r>
-              <a:rPr sz="1700" b="0">
+              <a:rPr sz="1600" b="0">
                 <a:solidFill>
                   <a:srgbClr val="FFFFFF"/>
                 </a:solidFill>
               </a:rPr>
-              <a:t>  Agent Gateway is the single ingress/egress chokepoint for tool traffic. Every tool call from a deployed agent passes thr</a:t>
+              <a:t>  The first thing to disable in any GEAP deployment is the legacy "default…</a:t>
             </a:r>
           </a:p>
         </p:txBody>
@@ -4184,12 +4286,12 @@
           <a:p>
             <a:pPr algn="l"/>
             <a:r>
-              <a:rPr sz="1700" b="0">
+              <a:rPr sz="1600" b="0">
                 <a:solidFill>
                   <a:srgbClr val="FFFFFF"/>
                 </a:solidFill>
               </a:rPr>
-              <a:t>  The default policy is permissive — you must opt into the strict baseline. The strict baseline below is the one we recomm</a:t>
+              <a:t>  Every agent should have its own SPIFFE-formatted Agent Identity, and every IAM…</a:t>
             </a:r>
           </a:p>
         </p:txBody>
@@ -4218,12 +4320,12 @@
           <a:p>
             <a:pPr algn="l"/>
             <a:r>
-              <a:rPr sz="1700" b="0">
+              <a:rPr sz="1600" b="0">
                 <a:solidFill>
                   <a:srgbClr val="FFFFFF"/>
                 </a:solidFill>
               </a:rPr>
-              <a:t>  # agent-gateway-policy.yaml</a:t>
+              <a:t>  The format is spiffe:///agent/ — this matches the SPIFFE specification for…</a:t>
             </a:r>
           </a:p>
         </p:txBody>
@@ -4252,12 +4354,12 @@
           <a:p>
             <a:pPr algn="l"/>
             <a:r>
-              <a:rPr sz="1700" b="0">
+              <a:rPr sz="1600" b="0">
                 <a:solidFill>
                   <a:srgbClr val="FFFFFF"/>
                 </a:solidFill>
               </a:rPr>
-              <a:t>  apiVersion: agentgateway.cloud.google.com/v1</a:t>
+              <a:t>  Two non-obvious details.</a:t>
             </a:r>
           </a:p>
         </p:txBody>
@@ -4346,12 +4448,12 @@
           <a:p>
             <a:pPr algn="l"/>
             <a:r>
-              <a:rPr sz="2800" b="1">
+              <a:rPr sz="2600" b="1">
                 <a:solidFill>
                   <a:srgbClr val="FFFFFF"/>
                 </a:solidFill>
               </a:rPr>
-              <a:t>Control 3: User-delegated OAuth via Agent Identity Auth Manager</a:t>
+              <a:t>Control 2: Agent Gateway and Model Armor</a:t>
             </a:r>
           </a:p>
         </p:txBody>
@@ -4423,12 +4525,12 @@
           <a:p>
             <a:pPr algn="l"/>
             <a:r>
-              <a:rPr sz="1700" b="0">
+              <a:rPr sz="1600" b="0">
                 <a:solidFill>
                   <a:srgbClr val="FFFFFF"/>
                 </a:solidFill>
               </a:rPr>
-              <a:t>  The hardest production question in agent security is "on whose behalf is this tool call happening?" An agent that reads </a:t>
+              <a:t>  Agent Gateway is the single ingress/egress chokepoint for tool traffic.</a:t>
             </a:r>
           </a:p>
         </p:txBody>
@@ -4457,12 +4559,12 @@
           <a:p>
             <a:pPr algn="l"/>
             <a:r>
-              <a:rPr sz="1700" b="0">
+              <a:rPr sz="1600" b="0">
                 <a:solidFill>
                   <a:srgbClr val="FFFFFF"/>
                 </a:solidFill>
               </a:rPr>
-              <a:t>  GEAP solves this with Agent Identity Auth Manager, which supports both 2-legged (agent-acting-as-itself) and 3-legged (a</a:t>
+              <a:t>  Every tool call from a deployed agent passes through Gateway, where four…</a:t>
             </a:r>
           </a:p>
         </p:txBody>
@@ -4491,12 +4593,12 @@
           <a:p>
             <a:pPr algn="l"/>
             <a:r>
-              <a:rPr sz="1700" b="0">
+              <a:rPr sz="1600" b="0">
                 <a:solidFill>
                   <a:srgbClr val="FFFFFF"/>
                 </a:solidFill>
               </a:rPr>
-              <a:t>  End user signs into your application with their corporate IdP (Okta, Entra ID, Google Workspace)</a:t>
+              <a:t>  The default policy is permissive — you must opt into the strict baseline.</a:t>
             </a:r>
           </a:p>
         </p:txBody>
@@ -4525,12 +4627,12 @@
           <a:p>
             <a:pPr algn="l"/>
             <a:r>
-              <a:rPr sz="1700" b="0">
+              <a:rPr sz="1600" b="0">
                 <a:solidFill>
                   <a:srgbClr val="FFFFFF"/>
                 </a:solidFill>
               </a:rPr>
-              <a:t>  Your application exchanges the user's IdP token for an OAuth 2.0 Token Exchange (RFC 8693) bearer token scoped to the ag</a:t>
+              <a:t>  deny_external_internet: true is the line a CISO will look for first.</a:t>
             </a:r>
           </a:p>
         </p:txBody>
@@ -4603,8 +4705,8 @@
         </p:nvSpPr>
         <p:spPr>
           <a:xfrm>
-            <a:off x="914400" y="2011680"/>
-            <a:ext cx="10332720" cy="914400"/>
+            <a:off x="914400" y="1645920"/>
+            <a:ext cx="10332720" cy="822960"/>
           </a:xfrm>
           <a:prstGeom prst="rect">
             <a:avLst/>
@@ -4619,26 +4721,69 @@
           <a:p>
             <a:pPr algn="ctr"/>
             <a:r>
-              <a:rPr sz="3000" b="1">
+              <a:rPr sz="3600" b="1">
                 <a:solidFill>
                   <a:srgbClr val="FFFFFF"/>
                 </a:solidFill>
               </a:rPr>
-              <a:t>Read the full article</a:t>
-            </a:r>
-          </a:p>
-        </p:txBody>
-      </p:sp>
-      <p:sp>
-        <p:nvSpPr>
-          <p:cNvPr id="3" name="TextBox 2"/>
+              <a:t>Try it next</a:t>
+            </a:r>
+          </a:p>
+        </p:txBody>
+      </p:sp>
+      <p:sp>
+        <p:nvSpPr>
+          <p:cNvPr id="3" name="Rectangle 2"/>
+          <p:cNvSpPr/>
+          <p:nvPr/>
+        </p:nvSpPr>
+        <p:spPr>
+          <a:xfrm>
+            <a:off x="731520" y="2514600"/>
+            <a:ext cx="10698480" cy="36576"/>
+          </a:xfrm>
+          <a:prstGeom prst="rect">
+            <a:avLst/>
+          </a:prstGeom>
+          <a:solidFill>
+            <a:srgbClr val="A1A1AA"/>
+          </a:solidFill>
+          <a:ln>
+            <a:noFill/>
+          </a:ln>
+        </p:spPr>
+        <p:style>
+          <a:lnRef idx="1">
+            <a:schemeClr val="accent1"/>
+          </a:lnRef>
+          <a:fillRef idx="3">
+            <a:schemeClr val="accent1"/>
+          </a:fillRef>
+          <a:effectRef idx="2">
+            <a:schemeClr val="accent1"/>
+          </a:effectRef>
+          <a:fontRef idx="minor">
+            <a:schemeClr val="lt1"/>
+          </a:fontRef>
+        </p:style>
+        <p:txBody>
+          <a:bodyPr rtlCol="0" anchor="ctr"/>
+          <a:lstStyle/>
+          <a:p>
+            <a:pPr algn="ctr"/>
+          </a:p>
+        </p:txBody>
+      </p:sp>
+      <p:sp>
+        <p:nvSpPr>
+          <p:cNvPr id="4" name="TextBox 3"/>
           <p:cNvSpPr txBox="1"/>
           <p:nvPr/>
         </p:nvSpPr>
         <p:spPr>
           <a:xfrm>
-            <a:off x="914400" y="3200400"/>
-            <a:ext cx="10332720" cy="822960"/>
+            <a:off x="914400" y="2697480"/>
+            <a:ext cx="10332720" cy="640080"/>
           </a:xfrm>
           <a:prstGeom prst="rect">
             <a:avLst/>
@@ -4653,26 +4798,26 @@
           <a:p>
             <a:pPr algn="ctr"/>
             <a:r>
-              <a:rPr sz="3600" b="1">
-                <a:solidFill>
-                  <a:srgbClr val="A1A1AA"/>
+              <a:rPr sz="1800" b="0">
+                <a:solidFill>
+                  <a:srgbClr val="FFFFFF"/>
                 </a:solidFill>
               </a:rPr>
-              <a:t>academy.kspl.tech</a:t>
-            </a:r>
-          </a:p>
-        </p:txBody>
-      </p:sp>
-      <p:sp>
-        <p:nvSpPr>
-          <p:cNvPr id="4" name="TextBox 3"/>
+              <a:t>Complete the hands-on exercise in this chapter.</a:t>
+            </a:r>
+          </a:p>
+        </p:txBody>
+      </p:sp>
+      <p:sp>
+        <p:nvSpPr>
+          <p:cNvPr id="5" name="TextBox 4"/>
           <p:cNvSpPr txBox="1"/>
           <p:nvPr/>
         </p:nvSpPr>
         <p:spPr>
           <a:xfrm>
-            <a:off x="914400" y="6263640"/>
-            <a:ext cx="10332720" cy="365760"/>
+            <a:off x="914400" y="3429000"/>
+            <a:ext cx="10332720" cy="640080"/>
           </a:xfrm>
           <a:prstGeom prst="rect">
             <a:avLst/>
@@ -4687,12 +4832,80 @@
           <a:p>
             <a:pPr algn="ctr"/>
             <a:r>
-              <a:rPr sz="1200" b="0">
+              <a:rPr sz="2000" b="0">
                 <a:solidFill>
                   <a:srgbClr val="A1A1AA"/>
                 </a:solidFill>
               </a:rPr>
-              <a:t>Koenig AI Academy</a:t>
+              <a:t>Then continue to Chapter 6 →</a:t>
+            </a:r>
+          </a:p>
+        </p:txBody>
+      </p:sp>
+      <p:sp>
+        <p:nvSpPr>
+          <p:cNvPr id="6" name="TextBox 5"/>
+          <p:cNvSpPr txBox="1"/>
+          <p:nvPr/>
+        </p:nvSpPr>
+        <p:spPr>
+          <a:xfrm>
+            <a:off x="914400" y="4572000"/>
+            <a:ext cx="10332720" cy="640080"/>
+          </a:xfrm>
+          <a:prstGeom prst="rect">
+            <a:avLst/>
+          </a:prstGeom>
+          <a:noFill/>
+        </p:spPr>
+        <p:txBody>
+          <a:bodyPr wrap="square">
+            <a:spAutoFit/>
+          </a:bodyPr>
+          <a:lstStyle/>
+          <a:p>
+            <a:pPr algn="ctr"/>
+            <a:r>
+              <a:rPr sz="2200" b="1">
+                <a:solidFill>
+                  <a:srgbClr val="A1A1AA"/>
+                </a:solidFill>
+              </a:rPr>
+              <a:t>academy.kspl.tech</a:t>
+            </a:r>
+          </a:p>
+        </p:txBody>
+      </p:sp>
+      <p:sp>
+        <p:nvSpPr>
+          <p:cNvPr id="7" name="TextBox 6"/>
+          <p:cNvSpPr txBox="1"/>
+          <p:nvPr/>
+        </p:nvSpPr>
+        <p:spPr>
+          <a:xfrm>
+            <a:off x="731520" y="6263640"/>
+            <a:ext cx="10698480" cy="365760"/>
+          </a:xfrm>
+          <a:prstGeom prst="rect">
+            <a:avLst/>
+          </a:prstGeom>
+          <a:noFill/>
+        </p:spPr>
+        <p:txBody>
+          <a:bodyPr wrap="square">
+            <a:spAutoFit/>
+          </a:bodyPr>
+          <a:lstStyle/>
+          <a:p>
+            <a:pPr algn="l"/>
+            <a:r>
+              <a:rPr sz="1000" b="0">
+                <a:solidFill>
+                  <a:srgbClr val="A1A1AA"/>
+                </a:solidFill>
+              </a:rPr>
+              <a:t>academy.kspl.tech | Koenig AI Academy</a:t>
             </a:r>
           </a:p>
         </p:txBody>
